--- a/presentation/2_inside_hevc_coding_loop.pptx
+++ b/presentation/2_inside_hevc_coding_loop.pptx
@@ -26,6 +26,7 @@
     <p:sldId id="271" r:id="rId17"/>
     <p:sldId id="272" r:id="rId18"/>
     <p:sldId id="273" r:id="rId19"/>
+    <p:sldId id="274" r:id="rId25"/>
   </p:sldIdLst>
   <p:sldSz cx="12192000" cy="6858000"/>
   <p:notesSz cx="6858000" cy="9144000"/>
@@ -6931,7 +6932,7 @@
                 </a:solidFill>
                 <a:latin typeface="Aptos" panose="020B0004020202020204" pitchFamily="34" charset="0"/>
               </a:rPr>
-              <a:t>01 / 18</a:t>
+              <a:t>01 / 19</a:t>
             </a:r>
           </a:p>
         </p:txBody>
@@ -9323,7 +9324,7 @@
                 </a:solidFill>
                 <a:latin typeface="Aptos" panose="020B0004020202020204" pitchFamily="34" charset="0"/>
               </a:rPr>
-              <a:t>10 / 18</a:t>
+              <a:t>10 / 19</a:t>
             </a:r>
           </a:p>
         </p:txBody>
@@ -22123,7 +22124,7 @@
                 </a:solidFill>
                 <a:latin typeface="Aptos" panose="020B0004020202020204" pitchFamily="34" charset="0"/>
               </a:rPr>
-              <a:t>11 / 18</a:t>
+              <a:t>11 / 19</a:t>
             </a:r>
           </a:p>
         </p:txBody>
@@ -23439,7 +23440,7 @@
                 </a:solidFill>
                 <a:latin typeface="Consolas" panose="020B0609020204030204" pitchFamily="49" charset="0"/>
               </a:rPr>
-              <a:t>1</a:t>
+              <a:t>0</a:t>
             </a:r>
           </a:p>
         </p:txBody>
@@ -24389,7 +24390,7 @@
                 </a:solidFill>
                 <a:latin typeface="Consolas" panose="020B0609020204030204" pitchFamily="49" charset="0"/>
               </a:rPr>
-              <a:t>1</a:t>
+              <a:t>0</a:t>
             </a:r>
           </a:p>
         </p:txBody>
@@ -29808,7 +29809,7 @@
                 </a:solidFill>
                 <a:latin typeface="Aptos" panose="020B0004020202020204" pitchFamily="34" charset="0"/>
               </a:rPr>
-              <a:t>12 / 18</a:t>
+              <a:t>12 / 19</a:t>
             </a:r>
           </a:p>
         </p:txBody>
@@ -31137,7 +31138,7 @@
                 </a:solidFill>
                 <a:latin typeface="Aptos" panose="020B0004020202020204" pitchFamily="34" charset="0"/>
               </a:rPr>
-              <a:t>13 / 18</a:t>
+              <a:t>13 / 19</a:t>
             </a:r>
           </a:p>
         </p:txBody>
@@ -32963,7 +32964,7 @@
                 </a:solidFill>
                 <a:latin typeface="Aptos" panose="020B0004020202020204" pitchFamily="34" charset="0"/>
               </a:rPr>
-              <a:t>14 / 18</a:t>
+              <a:t>14 / 19</a:t>
             </a:r>
           </a:p>
         </p:txBody>
@@ -34918,7 +34919,7 @@
                 </a:solidFill>
                 <a:latin typeface="Aptos" panose="020B0004020202020204" pitchFamily="34" charset="0"/>
               </a:rPr>
-              <a:t>15 / 18</a:t>
+              <a:t>15 / 19</a:t>
             </a:r>
           </a:p>
         </p:txBody>
@@ -36209,7 +36210,7 @@
                 </a:solidFill>
                 <a:latin typeface="Aptos" panose="020B0004020202020204" pitchFamily="34" charset="0"/>
               </a:rPr>
-              <a:t>16 / 18</a:t>
+              <a:t>16 / 19</a:t>
             </a:r>
           </a:p>
         </p:txBody>
@@ -38971,7 +38972,7 @@
                 </a:solidFill>
                 <a:latin typeface="Aptos" panose="020B0004020202020204" pitchFamily="34" charset="0"/>
               </a:rPr>
-              <a:t>17 / 18</a:t>
+              <a:t>17 / 19</a:t>
             </a:r>
           </a:p>
         </p:txBody>
@@ -40065,7 +40066,1101 @@
                 </a:solidFill>
                 <a:latin typeface="Aptos" panose="020B0004020202020204" pitchFamily="34" charset="0"/>
               </a:rPr>
-              <a:t>18 / 18</a:t>
+              <a:t>18 / 19</a:t>
+            </a:r>
+          </a:p>
+        </p:txBody>
+      </p:sp>
+    </p:spTree>
+    <p:extLst>
+      <p:ext uri="{BB962C8B-B14F-4D97-AF65-F5344CB8AC3E}">
+        <p14:creationId xmlns:p14="http://schemas.microsoft.com/office/powerpoint/2010/main" val="141865641"/>
+      </p:ext>
+    </p:extLst>
+  </p:cSld>
+  <p:clrMapOvr>
+    <a:masterClrMapping/>
+  </p:clrMapOvr>
+</p:sld>
+</file>
+
+<file path=ppt/slides/slide19.xml><?xml version="1.0" encoding="utf-8"?>
+<p:sld xmlns:a="http://schemas.openxmlformats.org/drawingml/2006/main" xmlns:r="http://schemas.openxmlformats.org/officeDocument/2006/relationships" xmlns:p="http://schemas.openxmlformats.org/presentationml/2006/main">
+  <p:cSld>
+    <p:spTree>
+      <p:nvGrpSpPr>
+        <p:cNvPr id="1" name=""/>
+        <p:cNvGrpSpPr/>
+        <p:nvPr/>
+      </p:nvGrpSpPr>
+      <p:grpSpPr>
+        <a:xfrm>
+          <a:off x="0" y="0"/>
+          <a:ext cx="0" cy="0"/>
+          <a:chOff x="0" y="0"/>
+          <a:chExt cx="0" cy="0"/>
+        </a:xfrm>
+      </p:grpSpPr>
+      <p:sp>
+        <p:nvSpPr>
+          <p:cNvPr id="2" name="Rectangle 1">
+            <a:extLst>
+              <a:ext uri="{FF2B5EF4-FFF2-40B4-BE49-F238E27FC236}">
+                <a16:creationId xmlns:a16="http://schemas.microsoft.com/office/drawing/2014/main" id="{192DB0FB-A34B-3A4D-50A9-BEA52A9C4F2D}"/>
+              </a:ext>
+            </a:extLst>
+          </p:cNvPr>
+          <p:cNvSpPr/>
+          <p:nvPr/>
+        </p:nvSpPr>
+        <p:spPr>
+          <a:xfrm>
+            <a:off x="0" y="0"/>
+            <a:ext cx="12192000" cy="6858000"/>
+          </a:xfrm>
+          <a:prstGeom prst="rect">
+            <a:avLst/>
+          </a:prstGeom>
+          <a:solidFill>
+            <a:srgbClr val="020B17"/>
+          </a:solidFill>
+          <a:ln w="12700" cap="flat" cmpd="sng" algn="ctr">
+            <a:noFill/>
+            <a:prstDash val="solid"/>
+            <a:miter lim="800000"/>
+          </a:ln>
+          <a:effectLst/>
+          <a:extLst>
+            <a:ext uri="{91240B29-F687-4F45-9708-019B960494DF}">
+              <a14:hiddenLine xmlns:a14="http://schemas.microsoft.com/office/drawing/2010/main" w="12700" cap="flat" cmpd="sng" algn="ctr">
+                <a:solidFill>
+                  <a:schemeClr val="accent1">
+                    <a:shade val="15000"/>
+                  </a:schemeClr>
+                </a:solidFill>
+                <a:prstDash val="solid"/>
+                <a:miter lim="800000"/>
+              </a14:hiddenLine>
+            </a:ext>
+          </a:extLst>
+        </p:spPr>
+        <p:style>
+          <a:lnRef idx="2">
+            <a:schemeClr val="accent1">
+              <a:shade val="15000"/>
+            </a:schemeClr>
+          </a:lnRef>
+          <a:fillRef idx="1">
+            <a:schemeClr val="accent1"/>
+          </a:fillRef>
+          <a:effectRef idx="0">
+            <a:schemeClr val="accent1"/>
+          </a:effectRef>
+          <a:fontRef idx="minor">
+            <a:schemeClr val="lt1"/>
+          </a:fontRef>
+        </p:style>
+        <p:txBody>
+          <a:bodyPr rtlCol="0" anchor="ctr"/>
+          <a:lstStyle/>
+          <a:p>
+            <a:pPr algn="ctr"/>
+            <a:endParaRPr lang="en-IN"/>
+          </a:p>
+        </p:txBody>
+      </p:sp>
+      <p:sp>
+        <p:nvSpPr>
+          <p:cNvPr id="3" name="Oval 2">
+            <a:extLst>
+              <a:ext uri="{FF2B5EF4-FFF2-40B4-BE49-F238E27FC236}">
+                <a16:creationId xmlns:a16="http://schemas.microsoft.com/office/drawing/2014/main" id="{4ACFB181-1462-41CD-FCFF-20E0C4B77208}"/>
+              </a:ext>
+            </a:extLst>
+          </p:cNvPr>
+          <p:cNvSpPr/>
+          <p:nvPr/>
+        </p:nvSpPr>
+        <p:spPr>
+          <a:xfrm>
+            <a:off x="9652000" y="-1397000"/>
+            <a:ext cx="3556000" cy="3556000"/>
+          </a:xfrm>
+          <a:prstGeom prst="ellipse">
+            <a:avLst/>
+          </a:prstGeom>
+          <a:solidFill>
+            <a:srgbClr val="1A8BFF">
+              <a:alpha val="12000"/>
+            </a:srgbClr>
+          </a:solidFill>
+          <a:ln w="12700" cap="flat" cmpd="sng" algn="ctr">
+            <a:noFill/>
+            <a:prstDash val="solid"/>
+            <a:miter lim="800000"/>
+          </a:ln>
+          <a:effectLst/>
+          <a:extLst>
+            <a:ext uri="{91240B29-F687-4F45-9708-019B960494DF}">
+              <a14:hiddenLine xmlns:a14="http://schemas.microsoft.com/office/drawing/2010/main" w="12700" cap="flat" cmpd="sng" algn="ctr">
+                <a:solidFill>
+                  <a:schemeClr val="accent1">
+                    <a:shade val="15000"/>
+                  </a:schemeClr>
+                </a:solidFill>
+                <a:prstDash val="solid"/>
+                <a:miter lim="800000"/>
+              </a14:hiddenLine>
+            </a:ext>
+          </a:extLst>
+        </p:spPr>
+        <p:style>
+          <a:lnRef idx="2">
+            <a:schemeClr val="accent1">
+              <a:shade val="15000"/>
+            </a:schemeClr>
+          </a:lnRef>
+          <a:fillRef idx="1">
+            <a:schemeClr val="accent1"/>
+          </a:fillRef>
+          <a:effectRef idx="0">
+            <a:schemeClr val="accent1"/>
+          </a:effectRef>
+          <a:fontRef idx="minor">
+            <a:schemeClr val="lt1"/>
+          </a:fontRef>
+        </p:style>
+        <p:txBody>
+          <a:bodyPr rtlCol="0" anchor="ctr"/>
+          <a:lstStyle/>
+          <a:p>
+            <a:pPr algn="ctr"/>
+            <a:endParaRPr lang="en-IN"/>
+          </a:p>
+        </p:txBody>
+      </p:sp>
+      <p:sp>
+        <p:nvSpPr>
+          <p:cNvPr id="4" name="Oval 3">
+            <a:extLst>
+              <a:ext uri="{FF2B5EF4-FFF2-40B4-BE49-F238E27FC236}">
+                <a16:creationId xmlns:a16="http://schemas.microsoft.com/office/drawing/2014/main" id="{5A849FFE-BC0E-04DB-097A-3C34997B7610}"/>
+              </a:ext>
+            </a:extLst>
+          </p:cNvPr>
+          <p:cNvSpPr/>
+          <p:nvPr/>
+        </p:nvSpPr>
+        <p:spPr>
+          <a:xfrm>
+            <a:off x="-1524000" y="5207000"/>
+            <a:ext cx="3175000" cy="3175000"/>
+          </a:xfrm>
+          <a:prstGeom prst="ellipse">
+            <a:avLst/>
+          </a:prstGeom>
+          <a:solidFill>
+            <a:srgbClr val="16E3F2">
+              <a:alpha val="7000"/>
+            </a:srgbClr>
+          </a:solidFill>
+          <a:ln w="12700" cap="flat" cmpd="sng" algn="ctr">
+            <a:noFill/>
+            <a:prstDash val="solid"/>
+            <a:miter lim="800000"/>
+          </a:ln>
+          <a:effectLst/>
+          <a:extLst>
+            <a:ext uri="{91240B29-F687-4F45-9708-019B960494DF}">
+              <a14:hiddenLine xmlns:a14="http://schemas.microsoft.com/office/drawing/2010/main" w="12700" cap="flat" cmpd="sng" algn="ctr">
+                <a:solidFill>
+                  <a:schemeClr val="accent1">
+                    <a:shade val="15000"/>
+                  </a:schemeClr>
+                </a:solidFill>
+                <a:prstDash val="solid"/>
+                <a:miter lim="800000"/>
+              </a14:hiddenLine>
+            </a:ext>
+          </a:extLst>
+        </p:spPr>
+        <p:style>
+          <a:lnRef idx="2">
+            <a:schemeClr val="accent1">
+              <a:shade val="15000"/>
+            </a:schemeClr>
+          </a:lnRef>
+          <a:fillRef idx="1">
+            <a:schemeClr val="accent1"/>
+          </a:fillRef>
+          <a:effectRef idx="0">
+            <a:schemeClr val="accent1"/>
+          </a:effectRef>
+          <a:fontRef idx="minor">
+            <a:schemeClr val="lt1"/>
+          </a:fontRef>
+        </p:style>
+        <p:txBody>
+          <a:bodyPr rtlCol="0" anchor="ctr"/>
+          <a:lstStyle/>
+          <a:p>
+            <a:pPr algn="ctr"/>
+            <a:endParaRPr lang="en-IN"/>
+          </a:p>
+        </p:txBody>
+      </p:sp>
+      <p:sp>
+        <p:nvSpPr>
+          <p:cNvPr id="5" name="TextBox 4">
+            <a:extLst>
+              <a:ext uri="{FF2B5EF4-FFF2-40B4-BE49-F238E27FC236}">
+                <a16:creationId xmlns:a16="http://schemas.microsoft.com/office/drawing/2014/main" id="{D3F5DDB7-1AC9-A08C-73C6-FCABE0D515AD}"/>
+              </a:ext>
+            </a:extLst>
+          </p:cNvPr>
+          <p:cNvSpPr txBox="1"/>
+          <p:nvPr/>
+        </p:nvSpPr>
+        <p:spPr>
+          <a:xfrm>
+            <a:off x="482600" y="304800"/>
+            <a:ext cx="11226800" cy="276999"/>
+          </a:xfrm>
+          <a:prstGeom prst="rect">
+            <a:avLst/>
+          </a:prstGeom>
+          <a:noFill/>
+        </p:spPr>
+        <p:txBody>
+          <a:bodyPr vert="horz" wrap="square" lIns="0" tIns="0" rIns="0" bIns="0" rtlCol="0">
+            <a:noAutofit/>
+          </a:bodyPr>
+          <a:lstStyle/>
+          <a:p>
+            <a:r>
+              <a:rPr lang="en-US" sz="2800" b="1">
+                <a:solidFill>
+                  <a:srgbClr val="F5F7FA"/>
+                </a:solidFill>
+                <a:latin typeface="Aptos Display" panose="020B0004020202020204" pitchFamily="34" charset="0"/>
+              </a:rPr>
+              <a:t>What's next: searching HEVC's decision space efficiently</a:t>
+            </a:r>
+            <a:endParaRPr lang="en-IN" sz="2800" b="1">
+              <a:solidFill>
+                <a:srgbClr val="F5F7FA"/>
+              </a:solidFill>
+              <a:latin typeface="Aptos Display" panose="020B0004020202020204" pitchFamily="34" charset="0"/>
+            </a:endParaRPr>
+          </a:p>
+        </p:txBody>
+      </p:sp>
+      <p:cxnSp>
+        <p:nvCxnSpPr>
+          <p:cNvPr id="6" name="Straight Connector 5">
+            <a:extLst>
+              <a:ext uri="{FF2B5EF4-FFF2-40B4-BE49-F238E27FC236}">
+                <a16:creationId xmlns:a16="http://schemas.microsoft.com/office/drawing/2014/main" id="{BC16F06F-FA3D-8932-1275-3498F1D6932A}"/>
+              </a:ext>
+            </a:extLst>
+          </p:cNvPr>
+          <p:cNvCxnSpPr/>
+          <p:nvPr/>
+        </p:nvCxnSpPr>
+        <p:spPr>
+          <a:xfrm>
+            <a:off x="508000" y="990600"/>
+            <a:ext cx="11176000" cy="0"/>
+          </a:xfrm>
+          <a:prstGeom prst="line">
+            <a:avLst/>
+          </a:prstGeom>
+          <a:ln w="12700">
+            <a:solidFill>
+              <a:srgbClr val="17486B"/>
+            </a:solidFill>
+          </a:ln>
+        </p:spPr>
+        <p:style>
+          <a:lnRef idx="1">
+            <a:schemeClr val="accent1"/>
+          </a:lnRef>
+          <a:fillRef idx="0">
+            <a:schemeClr val="accent1"/>
+          </a:fillRef>
+          <a:effectRef idx="0">
+            <a:schemeClr val="accent1"/>
+          </a:effectRef>
+          <a:fontRef idx="minor">
+            <a:schemeClr val="tx1"/>
+          </a:fontRef>
+        </p:style>
+      </p:cxnSp>
+      <p:sp>
+        <p:nvSpPr>
+          <p:cNvPr id="7" name="Oval 6">
+            <a:extLst>
+              <a:ext uri="{FF2B5EF4-FFF2-40B4-BE49-F238E27FC236}">
+                <a16:creationId xmlns:a16="http://schemas.microsoft.com/office/drawing/2014/main" id="{5984D8B5-DDE9-E464-61DC-ED3352572585}"/>
+              </a:ext>
+            </a:extLst>
+          </p:cNvPr>
+          <p:cNvSpPr/>
+          <p:nvPr/>
+        </p:nvSpPr>
+        <p:spPr>
+          <a:xfrm>
+            <a:off x="787400" y="1333500"/>
+            <a:ext cx="508000" cy="508000"/>
+          </a:xfrm>
+          <a:prstGeom prst="ellipse">
+            <a:avLst/>
+          </a:prstGeom>
+          <a:solidFill>
+            <a:srgbClr val="06182B"/>
+          </a:solidFill>
+          <a:ln w="25400">
+            <a:solidFill>
+              <a:srgbClr val="16E3F2"/>
+            </a:solidFill>
+          </a:ln>
+        </p:spPr>
+        <p:style>
+          <a:lnRef idx="2">
+            <a:schemeClr val="accent1">
+              <a:shade val="15000"/>
+            </a:schemeClr>
+          </a:lnRef>
+          <a:fillRef idx="1">
+            <a:schemeClr val="accent1"/>
+          </a:fillRef>
+          <a:effectRef idx="0">
+            <a:schemeClr val="accent1"/>
+          </a:effectRef>
+          <a:fontRef idx="minor">
+            <a:schemeClr val="lt1"/>
+          </a:fontRef>
+        </p:style>
+        <p:txBody>
+          <a:bodyPr lIns="0" tIns="0" rIns="0" bIns="0" rtlCol="0" anchor="ctr"/>
+          <a:lstStyle/>
+          <a:p>
+            <a:pPr algn="ctr"/>
+            <a:r>
+              <a:rPr lang="en-IN" sz="1600" b="1">
+                <a:solidFill>
+                  <a:srgbClr val="16E3F2"/>
+                </a:solidFill>
+                <a:latin typeface="Aptos Display" panose="020B0004020202020204" pitchFamily="34" charset="0"/>
+              </a:rPr>
+              <a:t>1</a:t>
+            </a:r>
+          </a:p>
+        </p:txBody>
+      </p:sp>
+      <p:sp>
+        <p:nvSpPr>
+          <p:cNvPr id="8" name="TextBox 7">
+            <a:extLst>
+              <a:ext uri="{FF2B5EF4-FFF2-40B4-BE49-F238E27FC236}">
+                <a16:creationId xmlns:a16="http://schemas.microsoft.com/office/drawing/2014/main" id="{2FE00820-639D-BE61-EE50-BA586EABBAB5}"/>
+              </a:ext>
+            </a:extLst>
+          </p:cNvPr>
+          <p:cNvSpPr txBox="1"/>
+          <p:nvPr/>
+        </p:nvSpPr>
+        <p:spPr>
+          <a:xfrm>
+            <a:off x="1549400" y="1320800"/>
+            <a:ext cx="3530600" cy="276999"/>
+          </a:xfrm>
+          <a:prstGeom prst="rect">
+            <a:avLst/>
+          </a:prstGeom>
+          <a:noFill/>
+        </p:spPr>
+        <p:txBody>
+          <a:bodyPr vert="horz" wrap="square" lIns="0" tIns="0" rIns="0" bIns="0" rtlCol="0">
+            <a:noAutofit/>
+          </a:bodyPr>
+          <a:lstStyle/>
+          <a:p>
+            <a:r>
+              <a:rPr lang="en-IN" sz="2000" b="1">
+                <a:solidFill>
+                  <a:srgbClr val="16E3F2"/>
+                </a:solidFill>
+                <a:latin typeface="Aptos Display" panose="020B0004020202020204" pitchFamily="34" charset="0"/>
+              </a:rPr>
+              <a:t>Fast mode and partition search</a:t>
+            </a:r>
+          </a:p>
+        </p:txBody>
+      </p:sp>
+      <p:sp>
+        <p:nvSpPr>
+          <p:cNvPr id="9" name="TextBox 8">
+            <a:extLst>
+              <a:ext uri="{FF2B5EF4-FFF2-40B4-BE49-F238E27FC236}">
+                <a16:creationId xmlns:a16="http://schemas.microsoft.com/office/drawing/2014/main" id="{8E269ACB-8E55-5BA5-9A7A-3091FBAECB49}"/>
+              </a:ext>
+            </a:extLst>
+          </p:cNvPr>
+          <p:cNvSpPr txBox="1"/>
+          <p:nvPr/>
+        </p:nvSpPr>
+        <p:spPr>
+          <a:xfrm>
+            <a:off x="5207000" y="1320800"/>
+            <a:ext cx="5969000" cy="276999"/>
+          </a:xfrm>
+          <a:prstGeom prst="rect">
+            <a:avLst/>
+          </a:prstGeom>
+          <a:noFill/>
+        </p:spPr>
+        <p:txBody>
+          <a:bodyPr vert="horz" wrap="square" lIns="0" tIns="0" rIns="0" bIns="0" rtlCol="0">
+            <a:noAutofit/>
+          </a:bodyPr>
+          <a:lstStyle/>
+          <a:p>
+            <a:r>
+              <a:rPr lang="en-US" sz="1600">
+                <a:solidFill>
+                  <a:srgbClr val="F5F7FA"/>
+                </a:solidFill>
+                <a:latin typeface="Aptos" panose="020B0004020202020204" pitchFamily="34" charset="0"/>
+              </a:rPr>
+              <a:t>Early termination and learned heuristics shrink the Rate–Distortion search.</a:t>
+            </a:r>
+            <a:endParaRPr lang="en-IN" sz="1600">
+              <a:solidFill>
+                <a:srgbClr val="F5F7FA"/>
+              </a:solidFill>
+              <a:latin typeface="Aptos" panose="020B0004020202020204" pitchFamily="34" charset="0"/>
+            </a:endParaRPr>
+          </a:p>
+        </p:txBody>
+      </p:sp>
+      <p:sp>
+        <p:nvSpPr>
+          <p:cNvPr id="10" name="Oval 9">
+            <a:extLst>
+              <a:ext uri="{FF2B5EF4-FFF2-40B4-BE49-F238E27FC236}">
+                <a16:creationId xmlns:a16="http://schemas.microsoft.com/office/drawing/2014/main" id="{8AE6BB31-F367-FD04-A0AE-7AF29D8AB0C6}"/>
+              </a:ext>
+            </a:extLst>
+          </p:cNvPr>
+          <p:cNvSpPr/>
+          <p:nvPr/>
+        </p:nvSpPr>
+        <p:spPr>
+          <a:xfrm>
+            <a:off x="787400" y="2387600"/>
+            <a:ext cx="508000" cy="508000"/>
+          </a:xfrm>
+          <a:prstGeom prst="ellipse">
+            <a:avLst/>
+          </a:prstGeom>
+          <a:solidFill>
+            <a:srgbClr val="06182B"/>
+          </a:solidFill>
+          <a:ln w="25400">
+            <a:solidFill>
+              <a:srgbClr val="1A8BFF"/>
+            </a:solidFill>
+          </a:ln>
+        </p:spPr>
+        <p:style>
+          <a:lnRef idx="2">
+            <a:schemeClr val="accent1">
+              <a:shade val="15000"/>
+            </a:schemeClr>
+          </a:lnRef>
+          <a:fillRef idx="1">
+            <a:schemeClr val="accent1"/>
+          </a:fillRef>
+          <a:effectRef idx="0">
+            <a:schemeClr val="accent1"/>
+          </a:effectRef>
+          <a:fontRef idx="minor">
+            <a:schemeClr val="lt1"/>
+          </a:fontRef>
+        </p:style>
+        <p:txBody>
+          <a:bodyPr lIns="0" tIns="0" rIns="0" bIns="0" rtlCol="0" anchor="ctr"/>
+          <a:lstStyle/>
+          <a:p>
+            <a:pPr algn="ctr"/>
+            <a:r>
+              <a:rPr lang="en-IN" sz="1600" b="1">
+                <a:solidFill>
+                  <a:srgbClr val="1A8BFF"/>
+                </a:solidFill>
+                <a:latin typeface="Aptos Display" panose="020B0004020202020204" pitchFamily="34" charset="0"/>
+              </a:rPr>
+              <a:t>2</a:t>
+            </a:r>
+          </a:p>
+        </p:txBody>
+      </p:sp>
+      <p:sp>
+        <p:nvSpPr>
+          <p:cNvPr id="11" name="TextBox 10">
+            <a:extLst>
+              <a:ext uri="{FF2B5EF4-FFF2-40B4-BE49-F238E27FC236}">
+                <a16:creationId xmlns:a16="http://schemas.microsoft.com/office/drawing/2014/main" id="{0C3314D6-A30D-3490-AB9D-2FF7CCA35B68}"/>
+              </a:ext>
+            </a:extLst>
+          </p:cNvPr>
+          <p:cNvSpPr txBox="1"/>
+          <p:nvPr/>
+        </p:nvSpPr>
+        <p:spPr>
+          <a:xfrm>
+            <a:off x="1549400" y="2374900"/>
+            <a:ext cx="3530600" cy="276999"/>
+          </a:xfrm>
+          <a:prstGeom prst="rect">
+            <a:avLst/>
+          </a:prstGeom>
+          <a:noFill/>
+        </p:spPr>
+        <p:txBody>
+          <a:bodyPr vert="horz" wrap="square" lIns="0" tIns="0" rIns="0" bIns="0" rtlCol="0">
+            <a:noAutofit/>
+          </a:bodyPr>
+          <a:lstStyle/>
+          <a:p>
+            <a:r>
+              <a:rPr lang="en-IN" sz="2000" b="1">
+                <a:solidFill>
+                  <a:srgbClr val="1A8BFF"/>
+                </a:solidFill>
+                <a:latin typeface="Aptos Display" panose="020B0004020202020204" pitchFamily="34" charset="0"/>
+              </a:rPr>
+              <a:t>Parallel processing</a:t>
+            </a:r>
+          </a:p>
+        </p:txBody>
+      </p:sp>
+      <p:sp>
+        <p:nvSpPr>
+          <p:cNvPr id="12" name="TextBox 11">
+            <a:extLst>
+              <a:ext uri="{FF2B5EF4-FFF2-40B4-BE49-F238E27FC236}">
+                <a16:creationId xmlns:a16="http://schemas.microsoft.com/office/drawing/2014/main" id="{957F25E9-1820-F226-556F-9DB564846C1A}"/>
+              </a:ext>
+            </a:extLst>
+          </p:cNvPr>
+          <p:cNvSpPr txBox="1"/>
+          <p:nvPr/>
+        </p:nvSpPr>
+        <p:spPr>
+          <a:xfrm>
+            <a:off x="5207000" y="2374900"/>
+            <a:ext cx="5969000" cy="276999"/>
+          </a:xfrm>
+          <a:prstGeom prst="rect">
+            <a:avLst/>
+          </a:prstGeom>
+          <a:noFill/>
+        </p:spPr>
+        <p:txBody>
+          <a:bodyPr vert="horz" wrap="square" lIns="0" tIns="0" rIns="0" bIns="0" rtlCol="0">
+            <a:noAutofit/>
+          </a:bodyPr>
+          <a:lstStyle/>
+          <a:p>
+            <a:r>
+              <a:rPr lang="en-US" sz="1600">
+                <a:solidFill>
+                  <a:srgbClr val="F5F7FA"/>
+                </a:solidFill>
+                <a:latin typeface="Aptos" panose="020B0004020202020204" pitchFamily="34" charset="0"/>
+              </a:rPr>
+              <a:t>Tiles and Wavefront Parallel Processing recover speed despite CABAC's serial coding.</a:t>
+            </a:r>
+            <a:endParaRPr lang="en-IN" sz="1600">
+              <a:solidFill>
+                <a:srgbClr val="F5F7FA"/>
+              </a:solidFill>
+              <a:latin typeface="Aptos" panose="020B0004020202020204" pitchFamily="34" charset="0"/>
+            </a:endParaRPr>
+          </a:p>
+        </p:txBody>
+      </p:sp>
+      <p:sp>
+        <p:nvSpPr>
+          <p:cNvPr id="13" name="Oval 12">
+            <a:extLst>
+              <a:ext uri="{FF2B5EF4-FFF2-40B4-BE49-F238E27FC236}">
+                <a16:creationId xmlns:a16="http://schemas.microsoft.com/office/drawing/2014/main" id="{93DCD568-C6E7-B69C-FC5D-7526D671E9C3}"/>
+              </a:ext>
+            </a:extLst>
+          </p:cNvPr>
+          <p:cNvSpPr/>
+          <p:nvPr/>
+        </p:nvSpPr>
+        <p:spPr>
+          <a:xfrm>
+            <a:off x="787400" y="3441700"/>
+            <a:ext cx="508000" cy="508000"/>
+          </a:xfrm>
+          <a:prstGeom prst="ellipse">
+            <a:avLst/>
+          </a:prstGeom>
+          <a:solidFill>
+            <a:srgbClr val="06182B"/>
+          </a:solidFill>
+          <a:ln w="25400">
+            <a:solidFill>
+              <a:srgbClr val="55E6A5"/>
+            </a:solidFill>
+          </a:ln>
+        </p:spPr>
+        <p:style>
+          <a:lnRef idx="2">
+            <a:schemeClr val="accent1">
+              <a:shade val="15000"/>
+            </a:schemeClr>
+          </a:lnRef>
+          <a:fillRef idx="1">
+            <a:schemeClr val="accent1"/>
+          </a:fillRef>
+          <a:effectRef idx="0">
+            <a:schemeClr val="accent1"/>
+          </a:effectRef>
+          <a:fontRef idx="minor">
+            <a:schemeClr val="lt1"/>
+          </a:fontRef>
+        </p:style>
+        <p:txBody>
+          <a:bodyPr lIns="0" tIns="0" rIns="0" bIns="0" rtlCol="0" anchor="ctr"/>
+          <a:lstStyle/>
+          <a:p>
+            <a:pPr algn="ctr"/>
+            <a:r>
+              <a:rPr lang="en-IN" sz="1600" b="1">
+                <a:solidFill>
+                  <a:srgbClr val="55E6A5"/>
+                </a:solidFill>
+                <a:latin typeface="Aptos Display" panose="020B0004020202020204" pitchFamily="34" charset="0"/>
+              </a:rPr>
+              <a:t>3</a:t>
+            </a:r>
+          </a:p>
+        </p:txBody>
+      </p:sp>
+      <p:sp>
+        <p:nvSpPr>
+          <p:cNvPr id="14" name="TextBox 13">
+            <a:extLst>
+              <a:ext uri="{FF2B5EF4-FFF2-40B4-BE49-F238E27FC236}">
+                <a16:creationId xmlns:a16="http://schemas.microsoft.com/office/drawing/2014/main" id="{D19BF2B1-BA28-1E98-1136-199CDE53483F}"/>
+              </a:ext>
+            </a:extLst>
+          </p:cNvPr>
+          <p:cNvSpPr txBox="1"/>
+          <p:nvPr/>
+        </p:nvSpPr>
+        <p:spPr>
+          <a:xfrm>
+            <a:off x="1549400" y="3429000"/>
+            <a:ext cx="3530600" cy="276999"/>
+          </a:xfrm>
+          <a:prstGeom prst="rect">
+            <a:avLst/>
+          </a:prstGeom>
+          <a:noFill/>
+        </p:spPr>
+        <p:txBody>
+          <a:bodyPr vert="horz" wrap="square" lIns="0" tIns="0" rIns="0" bIns="0" rtlCol="0">
+            <a:noAutofit/>
+          </a:bodyPr>
+          <a:lstStyle/>
+          <a:p>
+            <a:r>
+              <a:rPr lang="en-IN" sz="2000" b="1">
+                <a:solidFill>
+                  <a:srgbClr val="55E6A5"/>
+                </a:solidFill>
+                <a:latin typeface="Aptos Display" panose="020B0004020202020204" pitchFamily="34" charset="0"/>
+              </a:rPr>
+              <a:t>Hardware acceleration</a:t>
+            </a:r>
+          </a:p>
+        </p:txBody>
+      </p:sp>
+      <p:sp>
+        <p:nvSpPr>
+          <p:cNvPr id="15" name="TextBox 14">
+            <a:extLst>
+              <a:ext uri="{FF2B5EF4-FFF2-40B4-BE49-F238E27FC236}">
+                <a16:creationId xmlns:a16="http://schemas.microsoft.com/office/drawing/2014/main" id="{015C9582-B83E-F2F9-B1DB-E0BCEBE6A509}"/>
+              </a:ext>
+            </a:extLst>
+          </p:cNvPr>
+          <p:cNvSpPr txBox="1"/>
+          <p:nvPr/>
+        </p:nvSpPr>
+        <p:spPr>
+          <a:xfrm>
+            <a:off x="5207000" y="3429000"/>
+            <a:ext cx="5969000" cy="276999"/>
+          </a:xfrm>
+          <a:prstGeom prst="rect">
+            <a:avLst/>
+          </a:prstGeom>
+          <a:noFill/>
+        </p:spPr>
+        <p:txBody>
+          <a:bodyPr vert="horz" wrap="square" lIns="0" tIns="0" rIns="0" bIns="0" rtlCol="0">
+            <a:noAutofit/>
+          </a:bodyPr>
+          <a:lstStyle/>
+          <a:p>
+            <a:r>
+              <a:rPr lang="en-US" sz="1600">
+                <a:solidFill>
+                  <a:srgbClr val="F5F7FA"/>
+                </a:solidFill>
+                <a:latin typeface="Aptos" panose="020B0004020202020204" pitchFamily="34" charset="0"/>
+              </a:rPr>
+              <a:t>Dedicated silicon speeds up motion estimation, the transform, and entropy coding.</a:t>
+            </a:r>
+            <a:endParaRPr lang="en-IN" sz="1600">
+              <a:solidFill>
+                <a:srgbClr val="F5F7FA"/>
+              </a:solidFill>
+              <a:latin typeface="Aptos" panose="020B0004020202020204" pitchFamily="34" charset="0"/>
+            </a:endParaRPr>
+          </a:p>
+        </p:txBody>
+      </p:sp>
+      <p:sp>
+        <p:nvSpPr>
+          <p:cNvPr id="16" name="Oval 15">
+            <a:extLst>
+              <a:ext uri="{FF2B5EF4-FFF2-40B4-BE49-F238E27FC236}">
+                <a16:creationId xmlns:a16="http://schemas.microsoft.com/office/drawing/2014/main" id="{948F9846-85B6-CC5E-E221-98F9318B182E}"/>
+              </a:ext>
+            </a:extLst>
+          </p:cNvPr>
+          <p:cNvSpPr/>
+          <p:nvPr/>
+        </p:nvSpPr>
+        <p:spPr>
+          <a:xfrm>
+            <a:off x="787400" y="4495800"/>
+            <a:ext cx="508000" cy="508000"/>
+          </a:xfrm>
+          <a:prstGeom prst="ellipse">
+            <a:avLst/>
+          </a:prstGeom>
+          <a:solidFill>
+            <a:srgbClr val="06182B"/>
+          </a:solidFill>
+          <a:ln w="25400">
+            <a:solidFill>
+              <a:srgbClr val="FFB454"/>
+            </a:solidFill>
+          </a:ln>
+        </p:spPr>
+        <p:style>
+          <a:lnRef idx="2">
+            <a:schemeClr val="accent1">
+              <a:shade val="15000"/>
+            </a:schemeClr>
+          </a:lnRef>
+          <a:fillRef idx="1">
+            <a:schemeClr val="accent1"/>
+          </a:fillRef>
+          <a:effectRef idx="0">
+            <a:schemeClr val="accent1"/>
+          </a:effectRef>
+          <a:fontRef idx="minor">
+            <a:schemeClr val="lt1"/>
+          </a:fontRef>
+        </p:style>
+        <p:txBody>
+          <a:bodyPr lIns="0" tIns="0" rIns="0" bIns="0" rtlCol="0" anchor="ctr"/>
+          <a:lstStyle/>
+          <a:p>
+            <a:pPr algn="ctr"/>
+            <a:r>
+              <a:rPr lang="en-IN" sz="1600" b="1">
+                <a:solidFill>
+                  <a:srgbClr val="FFB454"/>
+                </a:solidFill>
+                <a:latin typeface="Aptos Display" panose="020B0004020202020204" pitchFamily="34" charset="0"/>
+              </a:rPr>
+              <a:t>4</a:t>
+            </a:r>
+          </a:p>
+        </p:txBody>
+      </p:sp>
+      <p:sp>
+        <p:nvSpPr>
+          <p:cNvPr id="17" name="TextBox 16">
+            <a:extLst>
+              <a:ext uri="{FF2B5EF4-FFF2-40B4-BE49-F238E27FC236}">
+                <a16:creationId xmlns:a16="http://schemas.microsoft.com/office/drawing/2014/main" id="{5080FAE5-70FD-09E4-554D-32117E446FC1}"/>
+              </a:ext>
+            </a:extLst>
+          </p:cNvPr>
+          <p:cNvSpPr txBox="1"/>
+          <p:nvPr/>
+        </p:nvSpPr>
+        <p:spPr>
+          <a:xfrm>
+            <a:off x="1549400" y="4483100"/>
+            <a:ext cx="3530600" cy="276999"/>
+          </a:xfrm>
+          <a:prstGeom prst="rect">
+            <a:avLst/>
+          </a:prstGeom>
+          <a:noFill/>
+        </p:spPr>
+        <p:txBody>
+          <a:bodyPr vert="horz" wrap="square" lIns="0" tIns="0" rIns="0" bIns="0" rtlCol="0">
+            <a:noAutofit/>
+          </a:bodyPr>
+          <a:lstStyle/>
+          <a:p>
+            <a:r>
+              <a:rPr lang="en-IN" sz="2000" b="1">
+                <a:solidFill>
+                  <a:srgbClr val="FFB454"/>
+                </a:solidFill>
+                <a:latin typeface="Aptos Display" panose="020B0004020202020204" pitchFamily="34" charset="0"/>
+              </a:rPr>
+              <a:t>Approximate computing</a:t>
+            </a:r>
+          </a:p>
+        </p:txBody>
+      </p:sp>
+      <p:sp>
+        <p:nvSpPr>
+          <p:cNvPr id="18" name="TextBox 17">
+            <a:extLst>
+              <a:ext uri="{FF2B5EF4-FFF2-40B4-BE49-F238E27FC236}">
+                <a16:creationId xmlns:a16="http://schemas.microsoft.com/office/drawing/2014/main" id="{C2CB07A5-8078-4362-7B92-68923AEE8B3E}"/>
+              </a:ext>
+            </a:extLst>
+          </p:cNvPr>
+          <p:cNvSpPr txBox="1"/>
+          <p:nvPr/>
+        </p:nvSpPr>
+        <p:spPr>
+          <a:xfrm>
+            <a:off x="5207000" y="4483100"/>
+            <a:ext cx="5969000" cy="276999"/>
+          </a:xfrm>
+          <a:prstGeom prst="rect">
+            <a:avLst/>
+          </a:prstGeom>
+          <a:noFill/>
+        </p:spPr>
+        <p:txBody>
+          <a:bodyPr vert="horz" wrap="square" lIns="0" tIns="0" rIns="0" bIns="0" rtlCol="0">
+            <a:noAutofit/>
+          </a:bodyPr>
+          <a:lstStyle/>
+          <a:p>
+            <a:r>
+              <a:rPr lang="en-IN" sz="1600">
+                <a:solidFill>
+                  <a:srgbClr val="F5F7FA"/>
+                </a:solidFill>
+                <a:latin typeface="Aptos" panose="020B0004020202020204" pitchFamily="34" charset="0"/>
+              </a:rPr>
+              <a:t>Low-power transform and quantization datapaths trade accuracy for energy savings.</a:t>
+            </a:r>
+          </a:p>
+        </p:txBody>
+      </p:sp>
+      <p:sp>
+        <p:nvSpPr>
+          <p:cNvPr id="19" name="Rectangle: Rounded Corners 18">
+            <a:extLst>
+              <a:ext uri="{FF2B5EF4-FFF2-40B4-BE49-F238E27FC236}">
+                <a16:creationId xmlns:a16="http://schemas.microsoft.com/office/drawing/2014/main" id="{87DA9B67-B983-3A2B-37AB-9BF1875E7624}"/>
+              </a:ext>
+            </a:extLst>
+          </p:cNvPr>
+          <p:cNvSpPr/>
+          <p:nvPr/>
+        </p:nvSpPr>
+        <p:spPr>
+          <a:xfrm>
+            <a:off x="787400" y="5676900"/>
+            <a:ext cx="10617200" cy="762000"/>
+          </a:xfrm>
+          <a:prstGeom prst="roundRect">
+            <a:avLst/>
+          </a:prstGeom>
+          <a:solidFill>
+            <a:srgbClr val="071E35">
+              <a:alpha val="97000"/>
+            </a:srgbClr>
+          </a:solidFill>
+          <a:ln w="19050">
+            <a:solidFill>
+              <a:srgbClr val="1A8BFF"/>
+            </a:solidFill>
+          </a:ln>
+        </p:spPr>
+        <p:style>
+          <a:lnRef idx="2">
+            <a:schemeClr val="accent1">
+              <a:shade val="15000"/>
+            </a:schemeClr>
+          </a:lnRef>
+          <a:fillRef idx="1">
+            <a:schemeClr val="accent1"/>
+          </a:fillRef>
+          <a:effectRef idx="0">
+            <a:schemeClr val="accent1"/>
+          </a:effectRef>
+          <a:fontRef idx="minor">
+            <a:schemeClr val="lt1"/>
+          </a:fontRef>
+        </p:style>
+        <p:txBody>
+          <a:bodyPr rtlCol="0" anchor="ctr"/>
+          <a:lstStyle/>
+          <a:p>
+            <a:pPr algn="ctr"/>
+            <a:endParaRPr lang="en-IN"/>
+          </a:p>
+        </p:txBody>
+      </p:sp>
+      <p:sp>
+        <p:nvSpPr>
+          <p:cNvPr id="20" name="TextBox 19">
+            <a:extLst>
+              <a:ext uri="{FF2B5EF4-FFF2-40B4-BE49-F238E27FC236}">
+                <a16:creationId xmlns:a16="http://schemas.microsoft.com/office/drawing/2014/main" id="{AB31DD98-B775-1551-F21F-77C41F0111D7}"/>
+              </a:ext>
+            </a:extLst>
+          </p:cNvPr>
+          <p:cNvSpPr txBox="1"/>
+          <p:nvPr/>
+        </p:nvSpPr>
+        <p:spPr>
+          <a:xfrm>
+            <a:off x="1066800" y="5854700"/>
+            <a:ext cx="2514600" cy="276999"/>
+          </a:xfrm>
+          <a:prstGeom prst="rect">
+            <a:avLst/>
+          </a:prstGeom>
+          <a:noFill/>
+        </p:spPr>
+        <p:txBody>
+          <a:bodyPr vert="horz" wrap="square" lIns="0" tIns="0" rIns="0" bIns="0" rtlCol="0">
+            <a:noAutofit/>
+          </a:bodyPr>
+          <a:lstStyle/>
+          <a:p>
+            <a:r>
+              <a:rPr lang="en-IN" sz="1700" b="1">
+                <a:solidFill>
+                  <a:srgbClr val="1A8BFF"/>
+                </a:solidFill>
+                <a:latin typeface="Aptos" panose="020B0004020202020204" pitchFamily="34" charset="0"/>
+              </a:rPr>
+              <a:t>Coming in Presentation 3:</a:t>
+            </a:r>
+          </a:p>
+        </p:txBody>
+      </p:sp>
+      <p:sp>
+        <p:nvSpPr>
+          <p:cNvPr id="21" name="TextBox 20">
+            <a:extLst>
+              <a:ext uri="{FF2B5EF4-FFF2-40B4-BE49-F238E27FC236}">
+                <a16:creationId xmlns:a16="http://schemas.microsoft.com/office/drawing/2014/main" id="{D83F69D9-24E7-A261-A43B-10780B3C577E}"/>
+              </a:ext>
+            </a:extLst>
+          </p:cNvPr>
+          <p:cNvSpPr txBox="1"/>
+          <p:nvPr/>
+        </p:nvSpPr>
+        <p:spPr>
+          <a:xfrm>
+            <a:off x="3581400" y="5803900"/>
+            <a:ext cx="7467600" cy="276999"/>
+          </a:xfrm>
+          <a:prstGeom prst="rect">
+            <a:avLst/>
+          </a:prstGeom>
+          <a:noFill/>
+        </p:spPr>
+        <p:txBody>
+          <a:bodyPr vert="horz" wrap="square" lIns="0" tIns="0" rIns="0" bIns="0" rtlCol="0">
+            <a:noAutofit/>
+          </a:bodyPr>
+          <a:lstStyle/>
+          <a:p>
+            <a:r>
+              <a:rPr lang="en-US" sz="2200" b="1">
+                <a:solidFill>
+                  <a:srgbClr val="F5F7FA"/>
+                </a:solidFill>
+                <a:latin typeface="Aptos Display" panose="020B0004020202020204" pitchFamily="34" charset="0"/>
+              </a:rPr>
+              <a:t>How Professor Sen's lab searches this space in real time, with less energy.</a:t>
+            </a:r>
+            <a:endParaRPr lang="en-IN" sz="2200" b="1">
+              <a:solidFill>
+                <a:srgbClr val="F5F7FA"/>
+              </a:solidFill>
+              <a:latin typeface="Aptos Display" panose="020B0004020202020204" pitchFamily="34" charset="0"/>
+            </a:endParaRPr>
+          </a:p>
+        </p:txBody>
+      </p:sp>
+      <p:sp>
+        <p:nvSpPr>
+          <p:cNvPr id="22" name="TextBox 21">
+            <a:extLst>
+              <a:ext uri="{FF2B5EF4-FFF2-40B4-BE49-F238E27FC236}">
+                <a16:creationId xmlns:a16="http://schemas.microsoft.com/office/drawing/2014/main" id="{7FC2ADEC-611E-13B7-3E8C-348FDA22AA48}"/>
+              </a:ext>
+            </a:extLst>
+          </p:cNvPr>
+          <p:cNvSpPr txBox="1"/>
+          <p:nvPr/>
+        </p:nvSpPr>
+        <p:spPr>
+          <a:xfrm>
+            <a:off x="10896600" y="6553200"/>
+            <a:ext cx="1041400" cy="276999"/>
+          </a:xfrm>
+          <a:prstGeom prst="rect">
+            <a:avLst/>
+          </a:prstGeom>
+          <a:noFill/>
+        </p:spPr>
+        <p:txBody>
+          <a:bodyPr vert="horz" wrap="square" lIns="0" tIns="0" rIns="0" bIns="0" rtlCol="0">
+            <a:noAutofit/>
+          </a:bodyPr>
+          <a:lstStyle/>
+          <a:p>
+            <a:pPr algn="r"/>
+            <a:r>
+              <a:rPr lang="en-IN" sz="900" b="1">
+                <a:solidFill>
+                  <a:srgbClr val="16E3F2"/>
+                </a:solidFill>
+                <a:latin typeface="Aptos" panose="020B0004020202020204" pitchFamily="34" charset="0"/>
+              </a:rPr>
+              <a:t>19 / 19</a:t>
             </a:r>
           </a:p>
         </p:txBody>
@@ -41135,7 +42230,7 @@
                 </a:solidFill>
                 <a:latin typeface="Aptos" panose="020B0004020202020204" pitchFamily="34" charset="0"/>
               </a:rPr>
-              <a:t>02 / 18</a:t>
+              <a:t>02 / 19</a:t>
             </a:r>
           </a:p>
         </p:txBody>
@@ -43040,7 +44135,7 @@
                 </a:solidFill>
                 <a:latin typeface="Aptos" panose="020B0004020202020204" pitchFamily="34" charset="0"/>
               </a:rPr>
-              <a:t>03 / 18</a:t>
+              <a:t>03 / 19</a:t>
             </a:r>
           </a:p>
         </p:txBody>
@@ -47892,7 +48987,7 @@
                 </a:solidFill>
                 <a:latin typeface="Aptos" panose="020B0004020202020204" pitchFamily="34" charset="0"/>
               </a:rPr>
-              <a:t>04 / 18</a:t>
+              <a:t>04 / 19</a:t>
             </a:r>
           </a:p>
         </p:txBody>
@@ -49502,7 +50597,7 @@
                 </a:solidFill>
                 <a:latin typeface="Aptos" panose="020B0004020202020204" pitchFamily="34" charset="0"/>
               </a:rPr>
-              <a:t>05 / 18</a:t>
+              <a:t>05 / 19</a:t>
             </a:r>
           </a:p>
         </p:txBody>
@@ -50729,7 +51824,7 @@
                 </a:solidFill>
                 <a:latin typeface="Aptos" panose="020B0004020202020204" pitchFamily="34" charset="0"/>
               </a:rPr>
-              <a:t>06 / 18</a:t>
+              <a:t>06 / 19</a:t>
             </a:r>
           </a:p>
         </p:txBody>
@@ -51912,7 +53007,7 @@
                 </a:solidFill>
                 <a:latin typeface="Aptos" panose="020B0004020202020204" pitchFamily="34" charset="0"/>
               </a:rPr>
-              <a:t>07 / 18</a:t>
+              <a:t>07 / 19</a:t>
             </a:r>
           </a:p>
         </p:txBody>
@@ -53035,7 +54130,7 @@
                 </a:solidFill>
                 <a:latin typeface="Aptos" panose="020B0004020202020204" pitchFamily="34" charset="0"/>
               </a:rPr>
-              <a:t>08 / 18</a:t>
+              <a:t>08 / 19</a:t>
             </a:r>
           </a:p>
         </p:txBody>
@@ -54567,7 +55662,7 @@
                 </a:solidFill>
                 <a:latin typeface="Aptos" panose="020B0004020202020204" pitchFamily="34" charset="0"/>
               </a:rPr>
-              <a:t>09 / 18</a:t>
+              <a:t>09 / 19</a:t>
             </a:r>
           </a:p>
         </p:txBody>
